--- a/week-05/presentations/ppts/day-05-perf-baselines-monitoring-ai-validation.pptx
+++ b/week-05/presentations/ppts/day-05-perf-baselines-monitoring-ai-validation.pptx
@@ -546,7 +546,7 @@
             </a:pPr>
             <a:r>
               <a:rPr/>
-              <a:t>Friday. TMD §5 + integration + sign-off. New discipline today: AI-summary validation log, cumulative across Weeks 2–5.</a:t>
+              <a:t>Friday. TMD Section 5 + integration + sign-off. New discipline today: AI-summary validation log, cumulative across Weeks 2–5.</a:t>
             </a:r>
           </a:p>
         </p:txBody>
@@ -1776,7 +1776,7 @@
             </a:pPr>
             <a:r>
               <a:rPr/>
-              <a:t>Three pieces of §5 + the integration. Hold the time strictly.</a:t>
+              <a:t>Three pieces of Section 5 + the integration. Hold the time strictly.</a:t>
             </a:r>
           </a:p>
         </p:txBody>
@@ -6253,7 +6253,7 @@
             </a:pPr>
             <a:r>
               <a:rPr/>
-              <a:t>TCD §1</a:t>
+              <a:t>TCD Section 1</a:t>
             </a:r>
           </a:p>
           <a:p>
@@ -6289,7 +6289,7 @@
             </a:pPr>
             <a:r>
               <a:rPr/>
-              <a:t>TMD §3</a:t>
+              <a:t>TMD Section 3</a:t>
             </a:r>
           </a:p>
           <a:p>
@@ -6325,7 +6325,7 @@
             </a:pPr>
             <a:r>
               <a:rPr/>
-              <a:t>TMD §2</a:t>
+              <a:t>TMD Section 2</a:t>
             </a:r>
           </a:p>
           <a:p>
@@ -6361,7 +6361,7 @@
             </a:pPr>
             <a:r>
               <a:rPr/>
-              <a:t>TMD §4</a:t>
+              <a:t>TMD Section 4</a:t>
             </a:r>
           </a:p>
           <a:p>
@@ -7039,52 +7039,52 @@
             </a:pPr>
             <a:r>
               <a:rPr/>
-              <a:t>Data model (§1)</a:t>
-            </a:r>
-          </a:p>
-          <a:p>
-            <a:pPr lvl="0" indent="0" marL="0">
-              <a:buNone/>
-            </a:pPr>
-            <a:r>
-              <a:rPr/>
-              <a:t>Cloud topology + ROM cost (§2)</a:t>
-            </a:r>
-          </a:p>
-          <a:p>
-            <a:pPr lvl="0" indent="0" marL="0">
-              <a:buNone/>
-            </a:pPr>
-            <a:r>
-              <a:rPr/>
-              <a:t>API contract (§3)</a:t>
-            </a:r>
-          </a:p>
-          <a:p>
-            <a:pPr lvl="0" indent="0" marL="0">
-              <a:buNone/>
-            </a:pPr>
-            <a:r>
-              <a:rPr/>
-              <a:t>Three sequence diagrams (§4)</a:t>
-            </a:r>
-          </a:p>
-          <a:p>
-            <a:pPr lvl="0" indent="0" marL="0">
-              <a:buNone/>
-            </a:pPr>
-            <a:r>
-              <a:rPr/>
-              <a:t>Baselines + monitoring + AI log (§5)</a:t>
-            </a:r>
-          </a:p>
-          <a:p>
-            <a:pPr lvl="0" indent="0" marL="0">
-              <a:buNone/>
-            </a:pPr>
-            <a:r>
-              <a:rPr/>
-              <a:t>Integrated TMD — sibling to PRD + TCD</a:t>
+              <a:t>Data model (Section 1)</a:t>
+            </a:r>
+          </a:p>
+          <a:p>
+            <a:pPr lvl="0" indent="0" marL="0">
+              <a:buNone/>
+            </a:pPr>
+            <a:r>
+              <a:rPr/>
+              <a:t>Cloud topology + ROM cost (Section 2)</a:t>
+            </a:r>
+          </a:p>
+          <a:p>
+            <a:pPr lvl="0" indent="0" marL="0">
+              <a:buNone/>
+            </a:pPr>
+            <a:r>
+              <a:rPr/>
+              <a:t>API contract (Section 3)</a:t>
+            </a:r>
+          </a:p>
+          <a:p>
+            <a:pPr lvl="0" indent="0" marL="0">
+              <a:buNone/>
+            </a:pPr>
+            <a:r>
+              <a:rPr/>
+              <a:t>Three sequence diagrams (Section 4)</a:t>
+            </a:r>
+          </a:p>
+          <a:p>
+            <a:pPr lvl="0" indent="0" marL="0">
+              <a:buNone/>
+            </a:pPr>
+            <a:r>
+              <a:rPr/>
+              <a:t>Baselines + monitoring + AI log (Section 5)</a:t>
+            </a:r>
+          </a:p>
+          <a:p>
+            <a:pPr lvl="0" indent="0" marL="0">
+              <a:buNone/>
+            </a:pPr>
+            <a:r>
+              <a:rPr/>
+              <a:t>Integrated TMD</a:t>
             </a:r>
           </a:p>
           <a:p>
@@ -7138,7 +7138,7 @@
             </a:pPr>
             <a:r>
               <a:rPr/>
-              <a:t>The TCD §6 matrix becomes the negotiation list</a:t>
+              <a:t>TCD Section 6 becomes the negotiation list</a:t>
             </a:r>
           </a:p>
           <a:p>
@@ -7447,7 +7447,7 @@
             </a:pPr>
             <a:r>
               <a:rPr/>
-              <a:t>Pin TMD §§1–4 on the wall</a:t>
+              <a:t>Pin TMD Sections 1–4 on the wall</a:t>
             </a:r>
           </a:p>
           <a:p>
@@ -7936,7 +7936,7 @@
             </a:pPr>
             <a:r>
               <a:rPr/>
-              <a:t>99.5% (= TCD §4)</a:t>
+              <a:t>99.5% (= TCD Section 4)</a:t>
             </a:r>
           </a:p>
           <a:p>

--- a/week-05/presentations/ppts/day-05-perf-baselines-monitoring-ai-validation.pptx
+++ b/week-05/presentations/ppts/day-05-perf-baselines-monitoring-ai-validation.pptx
@@ -7048,7 +7048,7 @@
             </a:pPr>
             <a:r>
               <a:rPr/>
-              <a:t>Cloud topology + ROM cost (Section 2)</a:t>
+              <a:t>Cloud topology + rough order of magnitude (ROM) cost (Section 2)</a:t>
             </a:r>
           </a:p>
           <a:p>
@@ -7138,16 +7138,16 @@
             </a:pPr>
             <a:r>
               <a:rPr/>
-              <a:t>TCD Section 6 becomes the negotiation list</a:t>
-            </a:r>
-          </a:p>
-          <a:p>
-            <a:pPr lvl="0" indent="0" marL="0">
-              <a:buNone/>
-            </a:pPr>
-            <a:r>
-              <a:rPr/>
-              <a:t>Bring to Monday: Your PRD + TCD + TMD. They are inputs to stakeholder conversations.</a:t>
+              <a:t>Technical Concept Document (TCD) Section 6 becomes the negotiation list</a:t>
+            </a:r>
+          </a:p>
+          <a:p>
+            <a:pPr lvl="0" indent="0" marL="0">
+              <a:buNone/>
+            </a:pPr>
+            <a:r>
+              <a:rPr/>
+              <a:t>Bring to Monday: Your Product Requirements Document (PRD) + TCD + TMD. They are inputs to stakeholder conversations.</a:t>
             </a:r>
           </a:p>
         </p:txBody>
@@ -7294,7 +7294,7 @@
             </a:pPr>
             <a:r>
               <a:rPr/>
-              <a:t>Set performance baselines for SLOs + key operational signals</a:t>
+              <a:t>Set performance baselines for Service Level Objectives (SLOs) + key operational signals</a:t>
             </a:r>
           </a:p>
           <a:p>
@@ -7330,7 +7330,7 @@
             </a:pPr>
             <a:r>
               <a:rPr/>
-              <a:t>Assemble + sign off the full TMD</a:t>
+              <a:t>Assemble + sign off the full Technical Modeling Document (TMD)</a:t>
             </a:r>
           </a:p>
         </p:txBody>

--- a/week-05/presentations/ppts/day-05-perf-baselines-monitoring-ai-validation.pptx
+++ b/week-05/presentations/ppts/day-05-perf-baselines-monitoring-ai-validation.pptx
@@ -792,7 +792,7 @@
             </a:pPr>
             <a:r>
               <a:rPr/>
-              <a:t>Push back on triads with &gt; 5 alerts. They’ll be tuning all of next sprint.</a:t>
+              <a:t>Push back on quads with &gt; 5 alerts. They’ll be tuning all of next sprint.</a:t>
             </a:r>
           </a:p>
         </p:txBody>
@@ -1530,7 +1530,7 @@
             </a:pPr>
             <a:r>
               <a:rPr/>
-              <a:t>Wrap-share: each triad names sharpest TMD insight + 1 question for Week 6 + final score.</a:t>
+              <a:t>Wrap-share: each quad names sharpest TMD insight + 1 question for Week 6 + final score.</a:t>
             </a:r>
           </a:p>
         </p:txBody>
@@ -1612,7 +1612,7 @@
             </a:pPr>
             <a:r>
               <a:rPr/>
-              <a:t>Round-robin close: each triad names 1 constraint they want to actively negotiate next week.</a:t>
+              <a:t>Round-robin close: each quad names 1 constraint they want to actively negotiate next week.</a:t>
             </a:r>
           </a:p>
         </p:txBody>
@@ -5701,7 +5701,7 @@
             </a:pPr>
             <a:r>
               <a:rPr b="1"/>
-              <a:t>Triads • 40 minutes</a:t>
+              <a:t>Quads • 40 minutes</a:t>
             </a:r>
           </a:p>
           <a:p>
@@ -6445,7 +6445,7 @@
             </a:pPr>
             <a:r>
               <a:rPr b="1"/>
-              <a:t>Triads • 40 minutes</a:t>
+              <a:t>Quads • 40 minutes</a:t>
             </a:r>
           </a:p>
           <a:p>
@@ -6913,7 +6913,7 @@
             </a:pPr>
             <a:r>
               <a:rPr b="1"/>
-              <a:t>Triads • 45 minutes • Wrap</a:t>
+              <a:t>Quads • 45 minutes • Wrap</a:t>
             </a:r>
           </a:p>
           <a:p>
@@ -8110,7 +8110,7 @@
             </a:pPr>
             <a:r>
               <a:rPr b="1"/>
-              <a:t>Triads • 35 minutes</a:t>
+              <a:t>Quads • 35 minutes</a:t>
             </a:r>
           </a:p>
           <a:p>

--- a/week-05/presentations/ppts/day-05-perf-baselines-monitoring-ai-validation.pptx
+++ b/week-05/presentations/ppts/day-05-perf-baselines-monitoring-ai-validation.pptx
@@ -5701,7 +5701,7 @@
             </a:pPr>
             <a:r>
               <a:rPr b="1"/>
-              <a:t>Quads • 40 minutes</a:t>
+              <a:t>Quads • 50 minutes</a:t>
             </a:r>
           </a:p>
           <a:p>
@@ -6445,7 +6445,7 @@
             </a:pPr>
             <a:r>
               <a:rPr b="1"/>
-              <a:t>Quads • 40 minutes</a:t>
+              <a:t>Quads • 50 minutes</a:t>
             </a:r>
           </a:p>
           <a:p>
@@ -6913,7 +6913,7 @@
             </a:pPr>
             <a:r>
               <a:rPr b="1"/>
-              <a:t>Quads • 45 minutes • Wrap</a:t>
+              <a:t>Quads • 55 minutes • Wrap</a:t>
             </a:r>
           </a:p>
           <a:p>
@@ -8110,7 +8110,7 @@
             </a:pPr>
             <a:r>
               <a:rPr b="1"/>
-              <a:t>Quads • 35 minutes</a:t>
+              <a:t>Quads • 45 minutes</a:t>
             </a:r>
           </a:p>
           <a:p>

--- a/week-05/presentations/ppts/day-05-perf-baselines-monitoring-ai-validation.pptx
+++ b/week-05/presentations/ppts/day-05-perf-baselines-monitoring-ai-validation.pptx
@@ -5710,7 +5710,7 @@
             </a:pPr>
             <a:r>
               <a:rPr/>
-              <a:t>15 min: 3–5 on-call alerts (4-question test each)</a:t>
+              <a:t>25 min: 3–5 on-call alerts (4-question test each)</a:t>
             </a:r>
           </a:p>
           <a:p>
@@ -5737,7 +5737,7 @@
             </a:pPr>
             <a:r>
               <a:rPr/>
-              <a:t>⏱ 15 + 15 + 10</a:t>
+              <a:t>⏱ 25 + 15 + 10</a:t>
             </a:r>
           </a:p>
         </p:txBody>
@@ -6454,7 +6454,7 @@
             </a:pPr>
             <a:r>
               <a:rPr/>
-              <a:t>15 min: inventory all AI uses across Weeks 2–5</a:t>
+              <a:t>25 min: inventory all AI uses across Weeks 2–5</a:t>
             </a:r>
           </a:p>
           <a:p>
@@ -6490,7 +6490,7 @@
             </a:pPr>
             <a:r>
               <a:rPr/>
-              <a:t>⏱ 15 + 15 + 5 + 5</a:t>
+              <a:t>⏱ 25 + 15 + 5 + 5</a:t>
             </a:r>
           </a:p>
         </p:txBody>
@@ -6940,7 +6940,7 @@
             </a:pPr>
             <a:r>
               <a:rPr/>
-              <a:t>20 min: cross-review with rubric</a:t>
+              <a:t>30 min: cross-review with rubric</a:t>
             </a:r>
           </a:p>
           <a:p>
@@ -6958,7 +6958,7 @@
             </a:pPr>
             <a:r>
               <a:rPr/>
-              <a:t>⏱ 10 + 5 + 20 + 10 · 15-min wrap</a:t>
+              <a:t>⏱ 10 + 5 + 30 + 10 · 15-min wrap</a:t>
             </a:r>
           </a:p>
         </p:txBody>
@@ -8137,7 +8137,7 @@
             </a:pPr>
             <a:r>
               <a:rPr/>
-              <a:t>15 min: capture baseline values + assumptions</a:t>
+              <a:t>25 min: capture baseline values + assumptions</a:t>
             </a:r>
           </a:p>
           <a:p>
@@ -8155,7 +8155,7 @@
             </a:pPr>
             <a:r>
               <a:rPr/>
-              <a:t>⏱ 5 + 5 + 15 + 10</a:t>
+              <a:t>⏱ 5 + 5 + 25 + 10</a:t>
             </a:r>
           </a:p>
         </p:txBody>
